--- a/Б.7.5_Модули/Б.7.5_Модуль2_Проектирование.pptx
+++ b/Б.7.5_Модули/Б.7.5_Модуль2_Проектирование.pptx
@@ -4303,7 +4303,7 @@
                 </a:solidFill>
                 <a:latin typeface="Inter"/>
               </a:rPr>
-              <a:t>Классификация сетей газораспределения и газопотребления по давлению, назначению и способу прокладки.</a:t>
+              <a:t>В проектной документации указываются границы охранных зон (ТР п. 18); маркировка трасс — опознавательные знаки (ТР п. 17).</a:t>
             </a:r>
           </a:p>
         </p:txBody>
@@ -4373,7 +4373,7 @@
                 </a:solidFill>
                 <a:latin typeface="Inter"/>
               </a:rPr>
-              <a:t>Выбор материалов труб (сталь, полиэтилен) с учётом давления, среды и условий прокладки.</a:t>
+              <a:t>Расстояния от газопроводов до зданий и сооружений — с учётом давления и плотности застройки (ТР п. 26).</a:t>
             </a:r>
           </a:p>
         </p:txBody>
@@ -4443,7 +4443,7 @@
                 </a:solidFill>
                 <a:latin typeface="Inter"/>
               </a:rPr>
-              <a:t>Расстояния до зданий, сооружений и инженерных коммуникаций; пересечения и параллельное следование.</a:t>
+              <a:t>Запрет прокладки по помещениям кат. А и Б, по горючим мостам (ТР п. 28).</a:t>
             </a:r>
           </a:p>
         </p:txBody>
@@ -4513,7 +4513,7 @@
                 </a:solidFill>
                 <a:latin typeface="Inter"/>
               </a:rPr>
-              <a:t>Охранные зоны газопроводов; требования к маркировке и сигнальным знакам на трассе.</a:t>
+              <a:t>Охранные зоны: 2 м от наружных газопроводов, 10 м от отдельно стоящих ГРП (ПП РФ № 878, п. 7).</a:t>
             </a:r>
           </a:p>
         </p:txBody>
@@ -4792,7 +4792,7 @@
                 </a:solidFill>
                 <a:latin typeface="Inter"/>
               </a:rPr>
-              <a:t>Проектом определяются тип ГРП/ГРУ, схема подключения, резервирование, система отопления и вентиляции помещений, газоопасные сигнализаторы, аварийное отключение и освещение. Внутренние газопроводы проектируются с учётом давления, категории помещений и требований взрывобезопасности.</a:t>
+              <a:t>Конструкции зданий ГРП должны обеспечивать взрывоустойчивость, I–II степень огнестойкости, класс С0; оснащение молниезащитой, заземлением и вентиляцией (ТР п. 35). Давление газа на входе в ГРУ — не более 0,6 МПа; размещение в помещениях кат. А и Б запрещено (ТР п. 42–43). Внутренние газопроводы — не в подвалах, не через лифтовые шахты (ТР п. 46).</a:t>
             </a:r>
           </a:p>
         </p:txBody>
@@ -4827,7 +4827,7 @@
                 </a:solidFill>
                 <a:latin typeface="Inter"/>
               </a:rPr>
-              <a:t>После строительства на каждый газопровод, ГРП и технологическую установку оформляется паспорт (ФНП № 531).</a:t>
+              <a:t>На каждый газопровод, ПРГ, ГРУ оформляется паспорт (ФНП № 531, п. 16). Экспертиза проекта обязательна (ТР п. 88–91).</a:t>
             </a:r>
           </a:p>
         </p:txBody>
@@ -5560,7 +5560,7 @@
                 </a:solidFill>
                 <a:latin typeface="Inter"/>
               </a:rPr>
-              <a:t>Проектные решения определяют безопасность эксплуатации на весь срок службы сети.</a:t>
+              <a:t>Проектная документация: охранные зоны (ТР п. 18), маркировка трасс (ТР п. 17), расстояния (ТР п. 26).</a:t>
             </a:r>
           </a:p>
         </p:txBody>
@@ -5630,7 +5630,7 @@
                 </a:solidFill>
                 <a:latin typeface="Inter"/>
               </a:rPr>
-              <a:t>Выбор материалов и трасс — по СП 42-102, СП 42-103, СП 62.13330.</a:t>
+              <a:t>ГРП/ГРУ: взрывоустойчивость, вентиляция, давление на входе ≤ 0,6 МПа (ТР п. 35, 42–43).</a:t>
             </a:r>
           </a:p>
         </p:txBody>
@@ -5700,7 +5700,7 @@
                 </a:solidFill>
                 <a:latin typeface="Inter"/>
               </a:rPr>
-              <a:t>ГРП/ГРУ проектируются с системами безопасности, вентиляцией и КИП.</a:t>
+              <a:t>Охранные зоны: 2 м от наружных газопроводов, 10 м от отдельно стоящих ГРП (ПП РФ № 878, п. 7).</a:t>
             </a:r>
           </a:p>
         </p:txBody>
@@ -5770,7 +5770,7 @@
                 </a:solidFill>
                 <a:latin typeface="Inter"/>
               </a:rPr>
-              <a:t>Экспертиза проектной документации обязательна для объектов капитального строительства.</a:t>
+              <a:t>Экспертиза проектной документации обязательна; паспорта на газопроводы — ФНП № 531, п. 16.</a:t>
             </a:r>
           </a:p>
         </p:txBody>
